--- a/curso/pptx/S42.pptx
+++ b/curso/pptx/S42.pptx
@@ -4176,7 +4176,7 @@
                 </a:solidFill>
                 <a:latin typeface="Nunito Sans"/>
               </a:rPr>
-              <a:t>Una media sola, sin ver los datos</a:t>
+              <a:t>只有一个平均数，没看数据</a:t>
             </a:r>
           </a:p>
           <a:p>
@@ -4201,7 +4201,7 @@
                 </a:solidFill>
                 <a:latin typeface="Nunito Sans"/>
               </a:rPr>
-              <a:t>Una anécdota como prueba de lo que pasa en general</a:t>
+              <a:t>把一个轶事当作一般情况的证据</a:t>
             </a:r>
           </a:p>
         </p:txBody>
@@ -4331,7 +4331,7 @@
                 </a:solidFill>
                 <a:latin typeface="Nunito Sans"/>
               </a:rPr>
-              <a:t>Mirar los datos por dentro y la mediana</a:t>
+              <a:t>查看数据内部和中位数</a:t>
             </a:r>
           </a:p>
           <a:p>
@@ -4356,7 +4356,7 @@
                 </a:solidFill>
                 <a:latin typeface="Nunito Sans"/>
               </a:rPr>
-              <a:t>Muchos casos contados bien</a:t>
+              <a:t>很多被好好统计的例子</a:t>
             </a:r>
           </a:p>
         </p:txBody>
@@ -7166,7 +7166,7 @@
                 </a:solidFill>
                 <a:latin typeface="Nunito Sans"/>
               </a:rPr>
-              <a:t>Eje cortado en barras:</a:t>
+              <a:t>柱状图里被截断的坐标轴：</a:t>
             </a:r>
             <a:r>
               <a:rPr sz="2800" b="0">
@@ -7175,7 +7175,7 @@
                 </a:solidFill>
                 <a:latin typeface="Nunito Sans"/>
               </a:rPr>
-              <a:t> exagera las diferencias (en temperaturas puede estar bien)</a:t>
+              <a:t>夸大差别（在气温图里可能是合理的）</a:t>
             </a:r>
           </a:p>
           <a:p>
@@ -7200,7 +7200,7 @@
                 </a:solidFill>
                 <a:latin typeface="Nunito Sans"/>
               </a:rPr>
-              <a:t>Escala y dibujos:</a:t>
+              <a:t>刻度和图案：</a:t>
             </a:r>
             <a:r>
               <a:rPr sz="2800" b="0">
@@ -7209,7 +7209,7 @@
                 </a:solidFill>
                 <a:latin typeface="Nunito Sans"/>
               </a:rPr>
-              <a:t> estiran o agrandan la impresión</a:t>
+              <a:t>拉长或放大观感</a:t>
             </a:r>
           </a:p>
           <a:p>
@@ -7234,7 +7234,7 @@
                 </a:solidFill>
                 <a:latin typeface="Nunito Sans"/>
               </a:rPr>
-              <a:t>Colores:</a:t>
+              <a:t>颜色：</a:t>
             </a:r>
             <a:r>
               <a:rPr sz="2800" b="0">
@@ -7243,7 +7243,7 @@
                 </a:solidFill>
                 <a:latin typeface="Nunito Sans"/>
               </a:rPr>
-              <a:t> el rojo asusta aunque el dato sea pequeño</a:t>
+              <a:t>即使数据很小，红色也会让人害怕</a:t>
             </a:r>
           </a:p>
           <a:p>
@@ -7268,7 +7268,7 @@
                 </a:solidFill>
                 <a:latin typeface="Nunito Sans"/>
               </a:rPr>
-              <a:t>Fechas recortadas:</a:t>
+              <a:t>被剪掉的日期：</a:t>
             </a:r>
             <a:r>
               <a:rPr sz="2800" b="0">
@@ -7277,7 +7277,7 @@
                 </a:solidFill>
                 <a:latin typeface="Nunito Sans"/>
               </a:rPr>
-              <a:t> enseñan solo lo que conviene</a:t>
+              <a:t>只展示对自己有利的</a:t>
             </a:r>
           </a:p>
         </p:txBody>
@@ -7782,7 +7782,7 @@
                 </a:solidFill>
                 <a:latin typeface="Nunito Sans"/>
               </a:rPr>
-              <a:t>A cause B (se sabe si se descartan las demás)</a:t>
+              <a:t>A导致B（如果排除了其他的，就能知道）</a:t>
             </a:r>
           </a:p>
           <a:p>
@@ -7807,7 +7807,7 @@
                 </a:solidFill>
                 <a:latin typeface="Nunito Sans"/>
               </a:rPr>
-              <a:t>B cause A</a:t>
+              <a:t>B导致A</a:t>
             </a:r>
           </a:p>
           <a:p>
@@ -7832,7 +7832,7 @@
                 </a:solidFill>
                 <a:latin typeface="Nunito Sans"/>
               </a:rPr>
-              <a:t>Una tercera causa produzca los dos</a:t>
+              <a:t>有第三个原因同时产生了这两者</a:t>
             </a:r>
           </a:p>
           <a:p>
@@ -7857,7 +7857,7 @@
                 </a:solidFill>
                 <a:latin typeface="Nunito Sans"/>
               </a:rPr>
-              <a:t>Sea pura casualidad</a:t>
+              <a:t>纯属巧合</a:t>
             </a:r>
           </a:p>
         </p:txBody>
